--- a/Reporte 211026.pptx
+++ b/Reporte 211026.pptx
@@ -6777,10 +6777,10 @@
       </p:sp>
       <p:pic>
         <p:nvPicPr>
-          <p:cNvPr id="6" name="Imagen 5">
+          <p:cNvPr id="4" name="Imagen 3">
             <a:extLst>
               <a:ext uri="{FF2B5EF4-FFF2-40B4-BE49-F238E27FC236}">
-                <a16:creationId xmlns:a16="http://schemas.microsoft.com/office/drawing/2014/main" id="{40EADD2D-C076-1BE6-D96C-7FB5A679F1C1}"/>
+                <a16:creationId xmlns:a16="http://schemas.microsoft.com/office/drawing/2014/main" id="{B2FF646E-5055-D5B0-F7EB-E7D8C41103B1}"/>
               </a:ext>
             </a:extLst>
           </p:cNvPr>
@@ -6797,8 +6797,8 @@
         </p:blipFill>
         <p:spPr>
           <a:xfrm>
-            <a:off x="0" y="881036"/>
-            <a:ext cx="9144000" cy="3524303"/>
+            <a:off x="0" y="943503"/>
+            <a:ext cx="9144000" cy="3399369"/>
           </a:xfrm>
           <a:prstGeom prst="rect">
             <a:avLst/>
@@ -6883,10 +6883,10 @@
       </p:sp>
       <p:pic>
         <p:nvPicPr>
-          <p:cNvPr id="4" name="Imagen 3">
+          <p:cNvPr id="3" name="Imagen 2">
             <a:extLst>
               <a:ext uri="{FF2B5EF4-FFF2-40B4-BE49-F238E27FC236}">
-                <a16:creationId xmlns:a16="http://schemas.microsoft.com/office/drawing/2014/main" id="{D3EAE4BA-BA48-6E28-0ECC-1A9FE3BA7204}"/>
+                <a16:creationId xmlns:a16="http://schemas.microsoft.com/office/drawing/2014/main" id="{4315A375-44CD-BE74-C4EF-39D548900CFB}"/>
               </a:ext>
             </a:extLst>
           </p:cNvPr>
@@ -6903,8 +6903,8 @@
         </p:blipFill>
         <p:spPr>
           <a:xfrm>
-            <a:off x="0" y="1293547"/>
-            <a:ext cx="9144000" cy="2699281"/>
+            <a:off x="0" y="1353694"/>
+            <a:ext cx="9144000" cy="2680911"/>
           </a:xfrm>
           <a:prstGeom prst="rect">
             <a:avLst/>
@@ -6989,10 +6989,10 @@
       </p:sp>
       <p:pic>
         <p:nvPicPr>
-          <p:cNvPr id="5" name="Imagen 4">
+          <p:cNvPr id="4" name="Imagen 3">
             <a:extLst>
               <a:ext uri="{FF2B5EF4-FFF2-40B4-BE49-F238E27FC236}">
-                <a16:creationId xmlns:a16="http://schemas.microsoft.com/office/drawing/2014/main" id="{C0013126-FA36-601A-007A-6F1DAB13F94D}"/>
+                <a16:creationId xmlns:a16="http://schemas.microsoft.com/office/drawing/2014/main" id="{64D24F89-D9F4-C70F-5D32-EECF830D2AE2}"/>
               </a:ext>
             </a:extLst>
           </p:cNvPr>
@@ -7009,8 +7009,8 @@
         </p:blipFill>
         <p:spPr>
           <a:xfrm>
-            <a:off x="0" y="749347"/>
-            <a:ext cx="9144000" cy="3787682"/>
+            <a:off x="0" y="801253"/>
+            <a:ext cx="9144000" cy="3683869"/>
           </a:xfrm>
           <a:prstGeom prst="rect">
             <a:avLst/>
@@ -7095,10 +7095,10 @@
       </p:sp>
       <p:pic>
         <p:nvPicPr>
-          <p:cNvPr id="4" name="Imagen 3">
+          <p:cNvPr id="3" name="Imagen 2">
             <a:extLst>
               <a:ext uri="{FF2B5EF4-FFF2-40B4-BE49-F238E27FC236}">
-                <a16:creationId xmlns:a16="http://schemas.microsoft.com/office/drawing/2014/main" id="{05136F35-4EBE-D734-ED43-6912065BF530}"/>
+                <a16:creationId xmlns:a16="http://schemas.microsoft.com/office/drawing/2014/main" id="{200846D5-346E-DFB3-EF4F-DF3B7AE43366}"/>
               </a:ext>
             </a:extLst>
           </p:cNvPr>
@@ -7115,8 +7115,8 @@
         </p:blipFill>
         <p:spPr>
           <a:xfrm>
-            <a:off x="0" y="1244311"/>
-            <a:ext cx="9144000" cy="2797754"/>
+            <a:off x="0" y="1219900"/>
+            <a:ext cx="9144000" cy="2846576"/>
           </a:xfrm>
           <a:prstGeom prst="rect">
             <a:avLst/>
@@ -7207,10 +7207,10 @@
       </p:sp>
       <p:pic>
         <p:nvPicPr>
-          <p:cNvPr id="3" name="Imagen 2">
+          <p:cNvPr id="4" name="Imagen 3">
             <a:extLst>
               <a:ext uri="{FF2B5EF4-FFF2-40B4-BE49-F238E27FC236}">
-                <a16:creationId xmlns:a16="http://schemas.microsoft.com/office/drawing/2014/main" id="{4D4937C8-1E0D-EC89-4E3A-AFC585918B5C}"/>
+                <a16:creationId xmlns:a16="http://schemas.microsoft.com/office/drawing/2014/main" id="{C27F92DA-B3B9-8066-49EA-9A91478ECF0A}"/>
               </a:ext>
             </a:extLst>
           </p:cNvPr>
@@ -7227,8 +7227,8 @@
         </p:blipFill>
         <p:spPr>
           <a:xfrm>
-            <a:off x="0" y="750901"/>
-            <a:ext cx="9144000" cy="3784573"/>
+            <a:off x="0" y="598348"/>
+            <a:ext cx="9144000" cy="4089679"/>
           </a:xfrm>
           <a:prstGeom prst="rect">
             <a:avLst/>
@@ -7319,10 +7319,10 @@
       </p:sp>
       <p:pic>
         <p:nvPicPr>
-          <p:cNvPr id="3" name="Imagen 2">
+          <p:cNvPr id="4" name="Imagen 3">
             <a:extLst>
               <a:ext uri="{FF2B5EF4-FFF2-40B4-BE49-F238E27FC236}">
-                <a16:creationId xmlns:a16="http://schemas.microsoft.com/office/drawing/2014/main" id="{E8281C81-04DC-3C59-5B11-949D7B25B53A}"/>
+                <a16:creationId xmlns:a16="http://schemas.microsoft.com/office/drawing/2014/main" id="{EE1E794F-176E-4E5F-C775-9F19D43FDB68}"/>
               </a:ext>
             </a:extLst>
           </p:cNvPr>
@@ -7339,8 +7339,8 @@
         </p:blipFill>
         <p:spPr>
           <a:xfrm>
-            <a:off x="1117841" y="364105"/>
-            <a:ext cx="6835293" cy="4779395"/>
+            <a:off x="0" y="683551"/>
+            <a:ext cx="9144000" cy="4021197"/>
           </a:xfrm>
           <a:prstGeom prst="rect">
             <a:avLst/>
